--- a/case_scholarlyarticles.pptx
+++ b/case_scholarlyarticles.pptx
@@ -5,7 +5,7 @@
     <p:sldMasterId id="2147483648" r:id="rId1"/>
   </p:sldMasterIdLst>
   <p:notesMasterIdLst>
-    <p:notesMasterId r:id="rId14"/>
+    <p:notesMasterId r:id="rId15"/>
   </p:notesMasterIdLst>
   <p:sldIdLst>
     <p:sldId id="256" r:id="rId4"/>
@@ -18,6 +18,7 @@
     <p:sldId id="263" r:id="rId11"/>
     <p:sldId id="264" r:id="rId12"/>
     <p:sldId id="265" r:id="rId13"/>
+    <p:sldId id="266" r:id="rId14"/>
   </p:sldIdLst>
   <p:sldSz cx="12192000" cy="6858000"/>
   <p:notesSz cx="6858000" cy="9144000"/>
@@ -143,7 +144,7 @@
       </p:grpSpPr>
       <p:sp>
         <p:nvSpPr>
-          <p:cNvPr id="1142459057" name="Header Placeholder 1"/>
+          <p:cNvPr id="824558588" name="Header Placeholder 1"/>
           <p:cNvSpPr>
             <a:spLocks noGrp="1"/>
           </p:cNvSpPr>
@@ -177,7 +178,7 @@
       </p:sp>
       <p:sp>
         <p:nvSpPr>
-          <p:cNvPr id="30682361" name="Date Placeholder 2"/>
+          <p:cNvPr id="1115815158" name="Date Placeholder 2"/>
           <p:cNvSpPr>
             <a:spLocks noGrp="1"/>
           </p:cNvSpPr>
@@ -215,7 +216,7 @@
       </p:sp>
       <p:sp>
         <p:nvSpPr>
-          <p:cNvPr id="406030382" name="Slide Image Placeholder 3"/>
+          <p:cNvPr id="1571754786" name="Slide Image Placeholder 3"/>
           <p:cNvSpPr>
             <a:spLocks noChangeAspect="1" noGrp="1" noRot="1"/>
           </p:cNvSpPr>
@@ -251,7 +252,7 @@
       </p:sp>
       <p:sp>
         <p:nvSpPr>
-          <p:cNvPr id="656943323" name="Notes Placeholder 4"/>
+          <p:cNvPr id="243113958" name="Notes Placeholder 4"/>
           <p:cNvSpPr>
             <a:spLocks noGrp="1"/>
           </p:cNvSpPr>
@@ -325,7 +326,7 @@
       </p:sp>
       <p:sp>
         <p:nvSpPr>
-          <p:cNvPr id="9367659" name="Footer Placeholder 5"/>
+          <p:cNvPr id="910312901" name="Footer Placeholder 5"/>
           <p:cNvSpPr>
             <a:spLocks noGrp="1"/>
           </p:cNvSpPr>
@@ -359,7 +360,7 @@
       </p:sp>
       <p:sp>
         <p:nvSpPr>
-          <p:cNvPr id="1526058421" name="Slide Number Placeholder 6"/>
+          <p:cNvPr id="2449997" name="Slide Number Placeholder 6"/>
           <p:cNvSpPr>
             <a:spLocks noGrp="1"/>
           </p:cNvSpPr>
@@ -512,7 +513,7 @@
       </p:grpSpPr>
       <p:sp>
         <p:nvSpPr>
-          <p:cNvPr id="1996094594" name="Slide Image Placeholder 1"/>
+          <p:cNvPr id="68577273" name="Slide Image Placeholder 1"/>
           <p:cNvSpPr>
             <a:spLocks noChangeAspect="1" noGrp="1" noRot="1"/>
           </p:cNvSpPr>
@@ -529,7 +530,7 @@
       </p:sp>
       <p:sp>
         <p:nvSpPr>
-          <p:cNvPr id="517482880" name="Notes Placeholder 2"/>
+          <p:cNvPr id="1872427161" name="Notes Placeholder 2"/>
           <p:cNvSpPr>
             <a:spLocks noGrp="1"/>
           </p:cNvSpPr>
@@ -554,7 +555,7 @@
       </p:sp>
       <p:sp>
         <p:nvSpPr>
-          <p:cNvPr id="680892329" name="Slide Number Placeholder 3"/>
+          <p:cNvPr id="204564610" name="Slide Number Placeholder 3"/>
           <p:cNvSpPr>
             <a:spLocks noGrp="1"/>
           </p:cNvSpPr>
@@ -671,6 +672,91 @@
 </p:notes>
 </file>
 
+<file path=ppt/notesSlides/notesSlide11.xml><?xml version="1.0" encoding="utf-8"?>
+<p:notes xmlns:a="http://schemas.openxmlformats.org/drawingml/2006/main" xmlns:r="http://schemas.openxmlformats.org/officeDocument/2006/relationships" xmlns:p="http://schemas.openxmlformats.org/presentationml/2006/main" xmlns:m="http://schemas.openxmlformats.org/officeDocument/2006/math" xmlns:w="http://schemas.openxmlformats.org/wordprocessingml/2006/main">
+  <p:cSld name="">
+    <p:spTree>
+      <p:nvGrpSpPr>
+        <p:cNvPr id="1" name=""/>
+        <p:cNvGrpSpPr/>
+        <p:nvPr/>
+      </p:nvGrpSpPr>
+      <p:grpSpPr bwMode="auto">
+        <a:xfrm>
+          <a:off x="0" y="0"/>
+          <a:ext cx="0" cy="0"/>
+          <a:chOff x="0" y="0"/>
+          <a:chExt cx="0" cy="0"/>
+        </a:xfrm>
+      </p:grpSpPr>
+      <p:sp>
+        <p:nvSpPr>
+          <p:cNvPr id="2" name="Slide Image Placeholder 1"/>
+          <p:cNvSpPr>
+            <a:spLocks noChangeAspect="1" noGrp="1" noRot="1"/>
+          </p:cNvSpPr>
+          <p:nvPr>
+            <p:ph type="sldImg"/>
+          </p:nvPr>
+        </p:nvSpPr>
+        <p:spPr bwMode="auto"/>
+      </p:sp>
+      <p:sp>
+        <p:nvSpPr>
+          <p:cNvPr id="3" name="Notes Placeholder 2"/>
+          <p:cNvSpPr>
+            <a:spLocks noGrp="1"/>
+          </p:cNvSpPr>
+          <p:nvPr>
+            <p:ph type="body" idx="1"/>
+          </p:nvPr>
+        </p:nvSpPr>
+        <p:spPr bwMode="auto"/>
+        <p:txBody>
+          <a:bodyPr/>
+          <a:lstStyle/>
+          <a:p>
+            <a:pPr>
+              <a:defRPr/>
+            </a:pPr>
+            <a:endParaRPr/>
+          </a:p>
+        </p:txBody>
+      </p:sp>
+      <p:sp>
+        <p:nvSpPr>
+          <p:cNvPr id="4" name="Slide Number Placeholder 3"/>
+          <p:cNvSpPr>
+            <a:spLocks noGrp="1"/>
+          </p:cNvSpPr>
+          <p:nvPr>
+            <p:ph type="sldNum" sz="quarter" idx="10"/>
+          </p:nvPr>
+        </p:nvSpPr>
+        <p:spPr bwMode="auto"/>
+        <p:txBody>
+          <a:bodyPr/>
+          <a:lstStyle/>
+          <a:p>
+            <a:pPr>
+              <a:defRPr/>
+            </a:pPr>
+            <a:fld id="{9309A001-BB1A-99D9-91A3-E3E355388FB8}" type="slidenum">
+              <a:rPr/>
+              <a:t/>
+            </a:fld>
+            <a:endParaRPr/>
+          </a:p>
+        </p:txBody>
+      </p:sp>
+    </p:spTree>
+  </p:cSld>
+  <p:clrMapOvr>
+    <a:masterClrMapping/>
+  </p:clrMapOvr>
+</p:notes>
+</file>
+
 <file path=ppt/notesSlides/notesSlide2.xml><?xml version="1.0" encoding="utf-8"?>
 <p:notes xmlns:a="http://schemas.openxmlformats.org/drawingml/2006/main" xmlns:r="http://schemas.openxmlformats.org/officeDocument/2006/relationships" xmlns:p="http://schemas.openxmlformats.org/presentationml/2006/main" xmlns:m="http://schemas.openxmlformats.org/officeDocument/2006/math" xmlns:w="http://schemas.openxmlformats.org/wordprocessingml/2006/main">
   <p:cSld name="">
@@ -690,7 +776,7 @@
       </p:grpSpPr>
       <p:sp>
         <p:nvSpPr>
-          <p:cNvPr id="105535196" name="Slide Image Placeholder 1"/>
+          <p:cNvPr id="564305411" name="Slide Image Placeholder 1"/>
           <p:cNvSpPr>
             <a:spLocks noChangeAspect="1" noGrp="1" noRot="1"/>
           </p:cNvSpPr>
@@ -702,7 +788,7 @@
       </p:sp>
       <p:sp>
         <p:nvSpPr>
-          <p:cNvPr id="137991238" name="Notes Placeholder 2"/>
+          <p:cNvPr id="750949451" name="Notes Placeholder 2"/>
           <p:cNvSpPr>
             <a:spLocks noGrp="1"/>
           </p:cNvSpPr>
@@ -724,7 +810,7 @@
       </p:sp>
       <p:sp>
         <p:nvSpPr>
-          <p:cNvPr id="711713071" name="Slide Number Placeholder 3"/>
+          <p:cNvPr id="1344272203" name="Slide Number Placeholder 3"/>
           <p:cNvSpPr>
             <a:spLocks noGrp="1"/>
           </p:cNvSpPr>
@@ -1370,7 +1456,7 @@
       </p:grpSpPr>
       <p:sp>
         <p:nvSpPr>
-          <p:cNvPr id="100595896" name="Shape 1059"/>
+          <p:cNvPr id="210350117" name="Shape 1059"/>
           <p:cNvSpPr>
             <a:spLocks noChangeArrowheads="1" noGrp="1"/>
           </p:cNvSpPr>
@@ -1493,7 +1579,7 @@
       </p:sp>
       <p:sp>
         <p:nvSpPr>
-          <p:cNvPr id="517420498" name="Shape 1060"/>
+          <p:cNvPr id="144625546" name="Shape 1060"/>
           <p:cNvSpPr>
             <a:spLocks noChangeArrowheads="1" noGrp="1"/>
           </p:cNvSpPr>
@@ -1584,7 +1670,7 @@
       </p:sp>
       <p:sp>
         <p:nvSpPr>
-          <p:cNvPr id="1652839825" name="Shape 1061"/>
+          <p:cNvPr id="1583767507" name="Shape 1061"/>
           <p:cNvSpPr>
             <a:spLocks noChangeArrowheads="1" noGrp="1"/>
           </p:cNvSpPr>
@@ -1670,7 +1756,7 @@
       </p:sp>
       <p:sp>
         <p:nvSpPr>
-          <p:cNvPr id="1523007410" name="Shape 1062"/>
+          <p:cNvPr id="390104417" name="Shape 1062"/>
           <p:cNvSpPr>
             <a:spLocks noChangeArrowheads="1" noGrp="1"/>
           </p:cNvSpPr>
@@ -1748,7 +1834,7 @@
       </p:sp>
       <p:sp>
         <p:nvSpPr>
-          <p:cNvPr id="1063605583" name="Shape 1063"/>
+          <p:cNvPr id="1856907771" name="Shape 1063"/>
           <p:cNvSpPr>
             <a:spLocks noChangeArrowheads="1" noGrp="1"/>
           </p:cNvSpPr>
@@ -1826,7 +1912,7 @@
       </p:sp>
       <p:sp>
         <p:nvSpPr>
-          <p:cNvPr id="2114788635" name="Subtitle 2"/>
+          <p:cNvPr id="1227373894" name="Subtitle 2"/>
           <p:cNvSpPr>
             <a:spLocks noGrp="1"/>
           </p:cNvSpPr>
@@ -1949,7 +2035,7 @@
       </p:sp>
       <p:sp>
         <p:nvSpPr>
-          <p:cNvPr id="1014706489" name="Date Placeholder 3"/>
+          <p:cNvPr id="1205926863" name="Date Placeholder 3"/>
           <p:cNvSpPr>
             <a:spLocks noGrp="1"/>
           </p:cNvSpPr>
@@ -1975,7 +2061,7 @@
       </p:sp>
       <p:sp>
         <p:nvSpPr>
-          <p:cNvPr id="440085622" name="Footer Placeholder 4"/>
+          <p:cNvPr id="1986409510" name="Footer Placeholder 4"/>
           <p:cNvSpPr>
             <a:spLocks noGrp="1"/>
           </p:cNvSpPr>
@@ -1997,7 +2083,7 @@
       </p:sp>
       <p:sp>
         <p:nvSpPr>
-          <p:cNvPr id="827889044" name="Slide Number Placeholder 5"/>
+          <p:cNvPr id="669446441" name="Slide Number Placeholder 5"/>
           <p:cNvSpPr>
             <a:spLocks noGrp="1"/>
           </p:cNvSpPr>
@@ -2023,7 +2109,7 @@
       </p:sp>
       <p:sp>
         <p:nvSpPr>
-          <p:cNvPr id="2060488616" name="Title 6"/>
+          <p:cNvPr id="1261768850" name="Title 6"/>
           <p:cNvSpPr>
             <a:spLocks noGrp="1"/>
           </p:cNvSpPr>
@@ -2083,7 +2169,7 @@
       </p:grpSpPr>
       <p:sp>
         <p:nvSpPr>
-          <p:cNvPr id="1277197388" name="Title 1"/>
+          <p:cNvPr id="186565616" name="Title 1"/>
           <p:cNvSpPr>
             <a:spLocks noGrp="1"/>
           </p:cNvSpPr>
@@ -2109,7 +2195,7 @@
       </p:sp>
       <p:sp>
         <p:nvSpPr>
-          <p:cNvPr id="70536315" name="Vertical Text Placeholder 2"/>
+          <p:cNvPr id="1342664849" name="Vertical Text Placeholder 2"/>
           <p:cNvSpPr>
             <a:spLocks noGrp="1"/>
           </p:cNvSpPr>
@@ -2175,7 +2261,7 @@
       </p:sp>
       <p:sp>
         <p:nvSpPr>
-          <p:cNvPr id="2142594809" name="Date Placeholder 3"/>
+          <p:cNvPr id="1463374733" name="Date Placeholder 3"/>
           <p:cNvSpPr>
             <a:spLocks noGrp="1"/>
           </p:cNvSpPr>
@@ -2201,7 +2287,7 @@
       </p:sp>
       <p:sp>
         <p:nvSpPr>
-          <p:cNvPr id="1961114614" name="Footer Placeholder 4"/>
+          <p:cNvPr id="1732461730" name="Footer Placeholder 4"/>
           <p:cNvSpPr>
             <a:spLocks noGrp="1"/>
           </p:cNvSpPr>
@@ -2223,7 +2309,7 @@
       </p:sp>
       <p:sp>
         <p:nvSpPr>
-          <p:cNvPr id="1016816944" name="Slide Number Placeholder 5"/>
+          <p:cNvPr id="1215045821" name="Slide Number Placeholder 5"/>
           <p:cNvSpPr>
             <a:spLocks noGrp="1"/>
           </p:cNvSpPr>
@@ -2274,7 +2360,7 @@
       </p:grpSpPr>
       <p:sp>
         <p:nvSpPr>
-          <p:cNvPr id="302788893" name="Vertical Title 1"/>
+          <p:cNvPr id="1410223096" name="Vertical Title 1"/>
           <p:cNvSpPr>
             <a:spLocks noGrp="1"/>
           </p:cNvSpPr>
@@ -2309,7 +2395,7 @@
       </p:sp>
       <p:sp>
         <p:nvSpPr>
-          <p:cNvPr id="21469194" name="Vertical Text Placeholder 2"/>
+          <p:cNvPr id="954393325" name="Vertical Text Placeholder 2"/>
           <p:cNvSpPr>
             <a:spLocks noGrp="1"/>
           </p:cNvSpPr>
@@ -2380,7 +2466,7 @@
       </p:sp>
       <p:sp>
         <p:nvSpPr>
-          <p:cNvPr id="1297432835" name="Date Placeholder 3"/>
+          <p:cNvPr id="699894294" name="Date Placeholder 3"/>
           <p:cNvSpPr>
             <a:spLocks noGrp="1"/>
           </p:cNvSpPr>
@@ -2406,7 +2492,7 @@
       </p:sp>
       <p:sp>
         <p:nvSpPr>
-          <p:cNvPr id="700883057" name="Footer Placeholder 4"/>
+          <p:cNvPr id="1184358025" name="Footer Placeholder 4"/>
           <p:cNvSpPr>
             <a:spLocks noGrp="1"/>
           </p:cNvSpPr>
@@ -2428,7 +2514,7 @@
       </p:sp>
       <p:sp>
         <p:nvSpPr>
-          <p:cNvPr id="74283495" name="Slide Number Placeholder 5"/>
+          <p:cNvPr id="1668429431" name="Slide Number Placeholder 5"/>
           <p:cNvSpPr>
             <a:spLocks noGrp="1"/>
           </p:cNvSpPr>
@@ -2479,7 +2565,7 @@
       </p:grpSpPr>
       <p:sp>
         <p:nvSpPr>
-          <p:cNvPr id="1516751434" name="Title 1"/>
+          <p:cNvPr id="1042785177" name="Title 1"/>
           <p:cNvSpPr>
             <a:spLocks noGrp="1"/>
           </p:cNvSpPr>
@@ -2505,7 +2591,7 @@
       </p:sp>
       <p:sp>
         <p:nvSpPr>
-          <p:cNvPr id="1819281766" name="Content Placeholder 2"/>
+          <p:cNvPr id="1981065593" name="Content Placeholder 2"/>
           <p:cNvSpPr>
             <a:spLocks noGrp="1"/>
           </p:cNvSpPr>
@@ -2571,7 +2657,7 @@
       </p:sp>
       <p:sp>
         <p:nvSpPr>
-          <p:cNvPr id="70250070" name="Date Placeholder 3"/>
+          <p:cNvPr id="1152324880" name="Date Placeholder 3"/>
           <p:cNvSpPr>
             <a:spLocks noGrp="1"/>
           </p:cNvSpPr>
@@ -2597,7 +2683,7 @@
       </p:sp>
       <p:sp>
         <p:nvSpPr>
-          <p:cNvPr id="1350705137" name="Footer Placeholder 4"/>
+          <p:cNvPr id="1925191405" name="Footer Placeholder 4"/>
           <p:cNvSpPr>
             <a:spLocks noGrp="1"/>
           </p:cNvSpPr>
@@ -2619,7 +2705,7 @@
       </p:sp>
       <p:sp>
         <p:nvSpPr>
-          <p:cNvPr id="1313763252" name="Slide Number Placeholder 5"/>
+          <p:cNvPr id="2057243377" name="Slide Number Placeholder 5"/>
           <p:cNvSpPr>
             <a:spLocks noGrp="1"/>
           </p:cNvSpPr>
@@ -2670,7 +2756,7 @@
       </p:grpSpPr>
       <p:sp>
         <p:nvSpPr>
-          <p:cNvPr id="1170120469" name="Title 1"/>
+          <p:cNvPr id="1264091590" name="Title 1"/>
           <p:cNvSpPr>
             <a:spLocks noGrp="1"/>
           </p:cNvSpPr>
@@ -2705,7 +2791,7 @@
       </p:sp>
       <p:sp>
         <p:nvSpPr>
-          <p:cNvPr id="1641907438" name="Text Placeholder 2"/>
+          <p:cNvPr id="906374721" name="Text Placeholder 2"/>
           <p:cNvSpPr>
             <a:spLocks noGrp="1"/>
           </p:cNvSpPr>
@@ -2827,7 +2913,7 @@
       </p:sp>
       <p:sp>
         <p:nvSpPr>
-          <p:cNvPr id="838246399" name="Date Placeholder 3"/>
+          <p:cNvPr id="772996041" name="Date Placeholder 3"/>
           <p:cNvSpPr>
             <a:spLocks noGrp="1"/>
           </p:cNvSpPr>
@@ -2853,7 +2939,7 @@
       </p:sp>
       <p:sp>
         <p:nvSpPr>
-          <p:cNvPr id="1051089854" name="Footer Placeholder 4"/>
+          <p:cNvPr id="1131561121" name="Footer Placeholder 4"/>
           <p:cNvSpPr>
             <a:spLocks noGrp="1"/>
           </p:cNvSpPr>
@@ -2875,7 +2961,7 @@
       </p:sp>
       <p:sp>
         <p:nvSpPr>
-          <p:cNvPr id="1026666209" name="Slide Number Placeholder 5"/>
+          <p:cNvPr id="96536734" name="Slide Number Placeholder 5"/>
           <p:cNvSpPr>
             <a:spLocks noGrp="1"/>
           </p:cNvSpPr>
@@ -2926,7 +3012,7 @@
       </p:grpSpPr>
       <p:sp>
         <p:nvSpPr>
-          <p:cNvPr id="2134988288" name="Title 1"/>
+          <p:cNvPr id="665201" name="Title 1"/>
           <p:cNvSpPr>
             <a:spLocks noGrp="1"/>
           </p:cNvSpPr>
@@ -2952,7 +3038,7 @@
       </p:sp>
       <p:sp>
         <p:nvSpPr>
-          <p:cNvPr id="1274905764" name="Content Placeholder 2"/>
+          <p:cNvPr id="1013434165" name="Content Placeholder 2"/>
           <p:cNvSpPr>
             <a:spLocks noGrp="1"/>
           </p:cNvSpPr>
@@ -3051,7 +3137,7 @@
       </p:sp>
       <p:sp>
         <p:nvSpPr>
-          <p:cNvPr id="138410106" name="Content Placeholder 3"/>
+          <p:cNvPr id="1449768381" name="Content Placeholder 3"/>
           <p:cNvSpPr>
             <a:spLocks noGrp="1"/>
           </p:cNvSpPr>
@@ -3150,7 +3236,7 @@
       </p:sp>
       <p:sp>
         <p:nvSpPr>
-          <p:cNvPr id="1810665222" name="Date Placeholder 4"/>
+          <p:cNvPr id="980804143" name="Date Placeholder 4"/>
           <p:cNvSpPr>
             <a:spLocks noGrp="1"/>
           </p:cNvSpPr>
@@ -3176,7 +3262,7 @@
       </p:sp>
       <p:sp>
         <p:nvSpPr>
-          <p:cNvPr id="346388690" name="Footer Placeholder 5"/>
+          <p:cNvPr id="1353838068" name="Footer Placeholder 5"/>
           <p:cNvSpPr>
             <a:spLocks noGrp="1"/>
           </p:cNvSpPr>
@@ -3198,7 +3284,7 @@
       </p:sp>
       <p:sp>
         <p:nvSpPr>
-          <p:cNvPr id="1194280994" name="Slide Number Placeholder 6"/>
+          <p:cNvPr id="376083615" name="Slide Number Placeholder 6"/>
           <p:cNvSpPr>
             <a:spLocks noGrp="1"/>
           </p:cNvSpPr>
@@ -3249,7 +3335,7 @@
       </p:grpSpPr>
       <p:sp>
         <p:nvSpPr>
-          <p:cNvPr id="171155349" name="Title 1"/>
+          <p:cNvPr id="1791916726" name="Title 1"/>
           <p:cNvSpPr>
             <a:spLocks noGrp="1"/>
           </p:cNvSpPr>
@@ -3279,7 +3365,7 @@
       </p:sp>
       <p:sp>
         <p:nvSpPr>
-          <p:cNvPr id="2039135308" name="Text Placeholder 2"/>
+          <p:cNvPr id="656090377" name="Text Placeholder 2"/>
           <p:cNvSpPr>
             <a:spLocks noGrp="1"/>
           </p:cNvSpPr>
@@ -3347,7 +3433,7 @@
       </p:sp>
       <p:sp>
         <p:nvSpPr>
-          <p:cNvPr id="485959229" name="Content Placeholder 3"/>
+          <p:cNvPr id="645828616" name="Content Placeholder 3"/>
           <p:cNvSpPr>
             <a:spLocks noGrp="1"/>
           </p:cNvSpPr>
@@ -3446,7 +3532,7 @@
       </p:sp>
       <p:sp>
         <p:nvSpPr>
-          <p:cNvPr id="2098192444" name="Text Placeholder 4"/>
+          <p:cNvPr id="2010518862" name="Text Placeholder 4"/>
           <p:cNvSpPr>
             <a:spLocks noGrp="1"/>
           </p:cNvSpPr>
@@ -3514,7 +3600,7 @@
       </p:sp>
       <p:sp>
         <p:nvSpPr>
-          <p:cNvPr id="1856976588" name="Content Placeholder 5"/>
+          <p:cNvPr id="901205044" name="Content Placeholder 5"/>
           <p:cNvSpPr>
             <a:spLocks noGrp="1"/>
           </p:cNvSpPr>
@@ -3613,7 +3699,7 @@
       </p:sp>
       <p:sp>
         <p:nvSpPr>
-          <p:cNvPr id="1466526324" name="Date Placeholder 6"/>
+          <p:cNvPr id="1834503929" name="Date Placeholder 6"/>
           <p:cNvSpPr>
             <a:spLocks noGrp="1"/>
           </p:cNvSpPr>
@@ -3639,7 +3725,7 @@
       </p:sp>
       <p:sp>
         <p:nvSpPr>
-          <p:cNvPr id="1283270721" name="Footer Placeholder 7"/>
+          <p:cNvPr id="201354053" name="Footer Placeholder 7"/>
           <p:cNvSpPr>
             <a:spLocks noGrp="1"/>
           </p:cNvSpPr>
@@ -3661,7 +3747,7 @@
       </p:sp>
       <p:sp>
         <p:nvSpPr>
-          <p:cNvPr id="1357278846" name="Slide Number Placeholder 8"/>
+          <p:cNvPr id="168066787" name="Slide Number Placeholder 8"/>
           <p:cNvSpPr>
             <a:spLocks noGrp="1"/>
           </p:cNvSpPr>
@@ -3712,7 +3798,7 @@
       </p:grpSpPr>
       <p:sp>
         <p:nvSpPr>
-          <p:cNvPr id="329498629" name="Title 1"/>
+          <p:cNvPr id="470426687" name="Title 1"/>
           <p:cNvSpPr>
             <a:spLocks noGrp="1"/>
           </p:cNvSpPr>
@@ -3738,7 +3824,7 @@
       </p:sp>
       <p:sp>
         <p:nvSpPr>
-          <p:cNvPr id="526256158" name="Date Placeholder 2"/>
+          <p:cNvPr id="1161313728" name="Date Placeholder 2"/>
           <p:cNvSpPr>
             <a:spLocks noGrp="1"/>
           </p:cNvSpPr>
@@ -3764,7 +3850,7 @@
       </p:sp>
       <p:sp>
         <p:nvSpPr>
-          <p:cNvPr id="514670504" name="Footer Placeholder 3"/>
+          <p:cNvPr id="186039753" name="Footer Placeholder 3"/>
           <p:cNvSpPr>
             <a:spLocks noGrp="1"/>
           </p:cNvSpPr>
@@ -3786,7 +3872,7 @@
       </p:sp>
       <p:sp>
         <p:nvSpPr>
-          <p:cNvPr id="309680284" name="Slide Number Placeholder 4"/>
+          <p:cNvPr id="1879776695" name="Slide Number Placeholder 4"/>
           <p:cNvSpPr>
             <a:spLocks noGrp="1"/>
           </p:cNvSpPr>
@@ -3837,7 +3923,7 @@
       </p:grpSpPr>
       <p:sp>
         <p:nvSpPr>
-          <p:cNvPr id="683387326" name="Date Placeholder 1"/>
+          <p:cNvPr id="373334797" name="Date Placeholder 1"/>
           <p:cNvSpPr>
             <a:spLocks noGrp="1"/>
           </p:cNvSpPr>
@@ -3863,7 +3949,7 @@
       </p:sp>
       <p:sp>
         <p:nvSpPr>
-          <p:cNvPr id="184882784" name="Footer Placeholder 2"/>
+          <p:cNvPr id="804895766" name="Footer Placeholder 2"/>
           <p:cNvSpPr>
             <a:spLocks noGrp="1"/>
           </p:cNvSpPr>
@@ -3885,7 +3971,7 @@
       </p:sp>
       <p:sp>
         <p:nvSpPr>
-          <p:cNvPr id="876927940" name="Slide Number Placeholder 3"/>
+          <p:cNvPr id="1234439627" name="Slide Number Placeholder 3"/>
           <p:cNvSpPr>
             <a:spLocks noGrp="1"/>
           </p:cNvSpPr>
@@ -3936,7 +4022,7 @@
       </p:grpSpPr>
       <p:sp>
         <p:nvSpPr>
-          <p:cNvPr id="295682072" name="Title 1"/>
+          <p:cNvPr id="302270424" name="Title 1"/>
           <p:cNvSpPr>
             <a:spLocks noGrp="1"/>
           </p:cNvSpPr>
@@ -3971,7 +4057,7 @@
       </p:sp>
       <p:sp>
         <p:nvSpPr>
-          <p:cNvPr id="228099350" name="Content Placeholder 2"/>
+          <p:cNvPr id="1231680934" name="Content Placeholder 2"/>
           <p:cNvSpPr>
             <a:spLocks noGrp="1"/>
           </p:cNvSpPr>
@@ -4070,7 +4156,7 @@
       </p:sp>
       <p:sp>
         <p:nvSpPr>
-          <p:cNvPr id="385860819" name="Text Placeholder 3"/>
+          <p:cNvPr id="13276207" name="Text Placeholder 3"/>
           <p:cNvSpPr>
             <a:spLocks noGrp="1"/>
           </p:cNvSpPr>
@@ -4138,7 +4224,7 @@
       </p:sp>
       <p:sp>
         <p:nvSpPr>
-          <p:cNvPr id="2126365799" name="Date Placeholder 4"/>
+          <p:cNvPr id="860452258" name="Date Placeholder 4"/>
           <p:cNvSpPr>
             <a:spLocks noGrp="1"/>
           </p:cNvSpPr>
@@ -4164,7 +4250,7 @@
       </p:sp>
       <p:sp>
         <p:nvSpPr>
-          <p:cNvPr id="592235566" name="Footer Placeholder 5"/>
+          <p:cNvPr id="537131016" name="Footer Placeholder 5"/>
           <p:cNvSpPr>
             <a:spLocks noGrp="1"/>
           </p:cNvSpPr>
@@ -4186,7 +4272,7 @@
       </p:sp>
       <p:sp>
         <p:nvSpPr>
-          <p:cNvPr id="232691462" name="Slide Number Placeholder 6"/>
+          <p:cNvPr id="841981714" name="Slide Number Placeholder 6"/>
           <p:cNvSpPr>
             <a:spLocks noGrp="1"/>
           </p:cNvSpPr>
@@ -4237,7 +4323,7 @@
       </p:grpSpPr>
       <p:sp>
         <p:nvSpPr>
-          <p:cNvPr id="74211526" name="Title 1"/>
+          <p:cNvPr id="460457528" name="Title 1"/>
           <p:cNvSpPr>
             <a:spLocks noGrp="1"/>
           </p:cNvSpPr>
@@ -4272,7 +4358,7 @@
       </p:sp>
       <p:sp>
         <p:nvSpPr>
-          <p:cNvPr id="706432262" name="Picture Placeholder 2"/>
+          <p:cNvPr id="962733121" name="Picture Placeholder 2"/>
           <p:cNvSpPr>
             <a:spLocks noGrp="1"/>
           </p:cNvSpPr>
@@ -4336,7 +4422,7 @@
       </p:sp>
       <p:sp>
         <p:nvSpPr>
-          <p:cNvPr id="768298496" name="Text Placeholder 3"/>
+          <p:cNvPr id="1900761173" name="Text Placeholder 3"/>
           <p:cNvSpPr>
             <a:spLocks noGrp="1"/>
           </p:cNvSpPr>
@@ -4404,7 +4490,7 @@
       </p:sp>
       <p:sp>
         <p:nvSpPr>
-          <p:cNvPr id="1206399332" name="Date Placeholder 4"/>
+          <p:cNvPr id="2101737122" name="Date Placeholder 4"/>
           <p:cNvSpPr>
             <a:spLocks noGrp="1"/>
           </p:cNvSpPr>
@@ -4430,7 +4516,7 @@
       </p:sp>
       <p:sp>
         <p:nvSpPr>
-          <p:cNvPr id="2040885149" name="Footer Placeholder 5"/>
+          <p:cNvPr id="1828566181" name="Footer Placeholder 5"/>
           <p:cNvSpPr>
             <a:spLocks noGrp="1"/>
           </p:cNvSpPr>
@@ -4452,7 +4538,7 @@
       </p:sp>
       <p:sp>
         <p:nvSpPr>
-          <p:cNvPr id="1910168182" name="Slide Number Placeholder 6"/>
+          <p:cNvPr id="1473084830" name="Slide Number Placeholder 6"/>
           <p:cNvSpPr>
             <a:spLocks noGrp="1"/>
           </p:cNvSpPr>
@@ -4508,7 +4594,7 @@
       </p:grpSpPr>
       <p:sp>
         <p:nvSpPr>
-          <p:cNvPr id="1360864367" name="Shape 1059"/>
+          <p:cNvPr id="733123113" name="Shape 1059"/>
           <p:cNvSpPr>
             <a:spLocks noChangeArrowheads="1" noGrp="1"/>
           </p:cNvSpPr>
@@ -4586,7 +4672,7 @@
       </p:sp>
       <p:sp>
         <p:nvSpPr>
-          <p:cNvPr id="88183733" name="Shape 1060"/>
+          <p:cNvPr id="1909281648" name="Shape 1060"/>
           <p:cNvSpPr>
             <a:spLocks noChangeArrowheads="1" noGrp="1"/>
           </p:cNvSpPr>
@@ -4667,7 +4753,7 @@
       </p:sp>
       <p:sp>
         <p:nvSpPr>
-          <p:cNvPr id="154995842" name="Shape 1061"/>
+          <p:cNvPr id="1021197910" name="Shape 1061"/>
           <p:cNvSpPr>
             <a:spLocks noChangeArrowheads="1" noGrp="1"/>
           </p:cNvSpPr>
@@ -4785,7 +4871,7 @@
       </p:sp>
       <p:sp>
         <p:nvSpPr>
-          <p:cNvPr id="1321035847" name="Title 1"/>
+          <p:cNvPr id="1851838896" name="Title 1"/>
           <p:cNvSpPr>
             <a:spLocks noGrp="1"/>
           </p:cNvSpPr>
@@ -4821,7 +4907,7 @@
       </p:sp>
       <p:sp>
         <p:nvSpPr>
-          <p:cNvPr id="2011434297" name="Text Placeholder 2"/>
+          <p:cNvPr id="1482665706" name="Text Placeholder 2"/>
           <p:cNvSpPr>
             <a:spLocks noGrp="1"/>
           </p:cNvSpPr>
@@ -4897,7 +4983,7 @@
       </p:sp>
       <p:sp>
         <p:nvSpPr>
-          <p:cNvPr id="1859699252" name="Date Placeholder 3"/>
+          <p:cNvPr id="40624892" name="Date Placeholder 3"/>
           <p:cNvSpPr>
             <a:spLocks noGrp="1"/>
           </p:cNvSpPr>
@@ -4941,7 +5027,7 @@
       </p:sp>
       <p:sp>
         <p:nvSpPr>
-          <p:cNvPr id="1689944761" name="Footer Placeholder 4"/>
+          <p:cNvPr id="1976673758" name="Footer Placeholder 4"/>
           <p:cNvSpPr>
             <a:spLocks noGrp="1"/>
           </p:cNvSpPr>
@@ -4981,7 +5067,7 @@
       </p:sp>
       <p:sp>
         <p:nvSpPr>
-          <p:cNvPr id="1001814109" name="Slide Number Placeholder 5"/>
+          <p:cNvPr id="1710008164" name="Slide Number Placeholder 5"/>
           <p:cNvSpPr>
             <a:spLocks noGrp="1"/>
           </p:cNvSpPr>
@@ -5329,7 +5415,7 @@
       </p:grpSpPr>
       <p:sp>
         <p:nvSpPr>
-          <p:cNvPr id="1081765662" name="Title 1"/>
+          <p:cNvPr id="161894971" name="Title 1"/>
           <p:cNvSpPr>
             <a:spLocks noGrp="1"/>
           </p:cNvSpPr>
@@ -5366,7 +5452,7 @@
       </p:sp>
       <p:sp>
         <p:nvSpPr>
-          <p:cNvPr id="419085448" name=""/>
+          <p:cNvPr id="1610229070" name=""/>
           <p:cNvSpPr txBox="1"/>
           <p:nvPr/>
         </p:nvSpPr>
@@ -5536,6 +5622,294 @@
             <a:r>
               <a:rPr i="1"/>
               <a:t>publish or perish</a:t>
+            </a:r>
+            <a:endParaRPr/>
+          </a:p>
+        </p:txBody>
+      </p:sp>
+    </p:spTree>
+  </p:cSld>
+  <p:clrMapOvr>
+    <a:masterClrMapping/>
+  </p:clrMapOvr>
+  <mc:AlternateContent xmlns:mc="http://schemas.openxmlformats.org/markup-compatibility/2006">
+    <mc:Choice xmlns:p159="http://schemas.microsoft.com/office/powerpoint/2015/09/main" xmlns:p14="http://schemas.microsoft.com/office/powerpoint/2010/main" Requires="p159">
+      <p:transition p14:dur="2000" advClick="1"/>
+    </mc:Choice>
+    <mc:Fallback>
+      <p:transition advClick="1"/>
+    </mc:Fallback>
+  </mc:AlternateContent>
+</p:sld>
+</file>
+
+<file path=ppt/slides/slide11.xml><?xml version="1.0" encoding="utf-8"?>
+<p:sld xmlns:a="http://schemas.openxmlformats.org/drawingml/2006/main" xmlns:r="http://schemas.openxmlformats.org/officeDocument/2006/relationships" xmlns:p="http://schemas.openxmlformats.org/presentationml/2006/main" xmlns:m="http://schemas.openxmlformats.org/officeDocument/2006/math" xmlns:w="http://schemas.openxmlformats.org/wordprocessingml/2006/main" xmlns:mc="http://schemas.openxmlformats.org/markup-compatibility/2006" showMasterPhAnim="0" showMasterSp="1" show="1">
+  <p:cSld name="">
+    <p:spTree>
+      <p:nvGrpSpPr>
+        <p:cNvPr id="1" name=""/>
+        <p:cNvGrpSpPr/>
+        <p:nvPr/>
+      </p:nvGrpSpPr>
+      <p:grpSpPr bwMode="auto">
+        <a:xfrm>
+          <a:off x="0" y="0"/>
+          <a:ext cx="0" cy="0"/>
+          <a:chOff x="0" y="0"/>
+          <a:chExt cx="0" cy="0"/>
+        </a:xfrm>
+      </p:grpSpPr>
+      <p:sp>
+        <p:nvSpPr>
+          <p:cNvPr id="1134202355" name="Title 1"/>
+          <p:cNvSpPr>
+            <a:spLocks noGrp="1"/>
+          </p:cNvSpPr>
+          <p:nvPr>
+            <p:ph type="title"/>
+          </p:nvPr>
+        </p:nvSpPr>
+        <p:spPr bwMode="auto"/>
+        <p:txBody>
+          <a:bodyPr/>
+          <a:lstStyle/>
+          <a:p>
+            <a:pPr>
+              <a:defRPr/>
+            </a:pPr>
+            <a:r>
+              <a:rPr/>
+              <a:t>(even deeper) Value</a:t>
+            </a:r>
+            <a:endParaRPr/>
+          </a:p>
+        </p:txBody>
+      </p:sp>
+      <p:sp>
+        <p:nvSpPr>
+          <p:cNvPr id="1015548591" name="Content Placeholder 2"/>
+          <p:cNvSpPr>
+            <a:spLocks noGrp="1"/>
+          </p:cNvSpPr>
+          <p:nvPr>
+            <p:ph idx="1"/>
+          </p:nvPr>
+        </p:nvSpPr>
+        <p:spPr bwMode="auto">
+          <a:xfrm flipH="0" flipV="0">
+            <a:off x="268649" y="1885950"/>
+            <a:ext cx="11506199" cy="4525961"/>
+          </a:xfrm>
+        </p:spPr>
+        <p:txBody>
+          <a:bodyPr vertOverflow="overflow" horzOverflow="overflow" vert="horz" wrap="square" lIns="91440" tIns="45720" rIns="91440" bIns="45720" numCol="1" spcCol="0" rtlCol="0" fromWordArt="0" anchor="t" anchorCtr="0" forceAA="0" upright="0" compatLnSpc="0">
+            <a:normAutofit fontScale="85000" lnSpcReduction="3000"/>
+          </a:bodyPr>
+          <a:lstStyle/>
+          <a:p>
+            <a:pPr>
+              <a:defRPr/>
+            </a:pPr>
+            <a:r>
+              <a:rPr lang="en-US" sz="3200" b="1" i="0" u="none" strike="noStrike" cap="none" spc="0">
+                <a:solidFill>
+                  <a:schemeClr val="tx1">
+                    <a:lumMod val="75000"/>
+                    <a:lumOff val="25000"/>
+                  </a:schemeClr>
+                </a:solidFill>
+                <a:latin typeface="Arial"/>
+                <a:ea typeface="Arial"/>
+                <a:cs typeface="Arial"/>
+              </a:rPr>
+              <a:t>novelty</a:t>
+            </a:r>
+            <a:r>
+              <a:rPr lang="en-US" sz="3200" b="0" i="0" u="none" strike="noStrike" cap="none" spc="0">
+                <a:solidFill>
+                  <a:schemeClr val="tx1">
+                    <a:lumMod val="75000"/>
+                    <a:lumOff val="25000"/>
+                  </a:schemeClr>
+                </a:solidFill>
+                <a:latin typeface="Arial"/>
+                <a:ea typeface="Arial"/>
+                <a:cs typeface="Arial"/>
+              </a:rPr>
+              <a:t>: kebaruan ide, metode, data, atau temuan hasil analisis/diskusi</a:t>
+            </a:r>
+            <a:endParaRPr lang="en-US" sz="3200" b="0" i="0" u="none" strike="noStrike" cap="none" spc="0">
+              <a:solidFill>
+                <a:schemeClr val="tx1">
+                  <a:lumMod val="75000"/>
+                  <a:lumOff val="25000"/>
+                </a:schemeClr>
+              </a:solidFill>
+              <a:latin typeface="Arial"/>
+              <a:cs typeface="Arial"/>
+            </a:endParaRPr>
+          </a:p>
+          <a:p>
+            <a:pPr>
+              <a:defRPr/>
+            </a:pPr>
+            <a:r>
+              <a:rPr lang="en-US" sz="3200" b="1" i="0" u="none" strike="noStrike" cap="none" spc="0">
+                <a:solidFill>
+                  <a:schemeClr val="tx1">
+                    <a:lumMod val="75000"/>
+                    <a:lumOff val="25000"/>
+                  </a:schemeClr>
+                </a:solidFill>
+                <a:latin typeface="Arial"/>
+                <a:ea typeface="Arial"/>
+                <a:cs typeface="Arial"/>
+              </a:rPr>
+              <a:t>teori</a:t>
+            </a:r>
+            <a:r>
+              <a:rPr lang="en-US" sz="3200" b="0" i="0" u="none" strike="noStrike" cap="none" spc="0">
+                <a:solidFill>
+                  <a:schemeClr val="tx1">
+                    <a:lumMod val="75000"/>
+                    <a:lumOff val="25000"/>
+                  </a:schemeClr>
+                </a:solidFill>
+                <a:latin typeface="Arial"/>
+                <a:ea typeface="Arial"/>
+                <a:cs typeface="Arial"/>
+              </a:rPr>
+              <a:t>: metode/framework yang sudah ada 'dimainkan' lagi supaya lebih 'sakti'</a:t>
+            </a:r>
+            <a:endParaRPr lang="en-US" sz="3200" b="0" i="0" u="none" strike="noStrike" cap="none" spc="0">
+              <a:solidFill>
+                <a:schemeClr val="tx1">
+                  <a:lumMod val="75000"/>
+                  <a:lumOff val="25000"/>
+                </a:schemeClr>
+              </a:solidFill>
+              <a:latin typeface="Arial"/>
+              <a:cs typeface="Arial"/>
+            </a:endParaRPr>
+          </a:p>
+          <a:p>
+            <a:pPr>
+              <a:defRPr/>
+            </a:pPr>
+            <a:r>
+              <a:rPr lang="en-US" sz="3200" b="1" i="0" u="none" strike="noStrike" cap="none" spc="0">
+                <a:solidFill>
+                  <a:schemeClr val="tx1">
+                    <a:lumMod val="75000"/>
+                    <a:lumOff val="25000"/>
+                  </a:schemeClr>
+                </a:solidFill>
+                <a:latin typeface="Arial"/>
+                <a:ea typeface="Arial"/>
+                <a:cs typeface="Arial"/>
+              </a:rPr>
+              <a:t>sintesis </a:t>
+            </a:r>
+            <a:r>
+              <a:rPr lang="en-US" sz="3200" b="0" i="0" u="none" strike="noStrike" cap="none" spc="0">
+                <a:solidFill>
+                  <a:schemeClr val="tx1">
+                    <a:lumMod val="75000"/>
+                    <a:lumOff val="25000"/>
+                  </a:schemeClr>
+                </a:solidFill>
+                <a:latin typeface="Arial"/>
+                <a:ea typeface="Arial"/>
+                <a:cs typeface="Arial"/>
+              </a:rPr>
+              <a:t>: kombinasi beberapa metode untuk menjawab kompleksitas masalah, mencari 'hubungan' antar domain/dispilin </a:t>
+            </a:r>
+            <a:endParaRPr lang="en-US" sz="3200" b="0" i="0" u="none" strike="noStrike" cap="none" spc="0">
+              <a:solidFill>
+                <a:schemeClr val="tx1">
+                  <a:lumMod val="75000"/>
+                  <a:lumOff val="25000"/>
+                </a:schemeClr>
+              </a:solidFill>
+              <a:latin typeface="Arial"/>
+              <a:cs typeface="Arial"/>
+            </a:endParaRPr>
+          </a:p>
+          <a:p>
+            <a:pPr>
+              <a:defRPr/>
+            </a:pPr>
+            <a:r>
+              <a:rPr lang="en-US" sz="3200" b="1" i="0" u="none" strike="noStrike" cap="none" spc="0">
+                <a:solidFill>
+                  <a:schemeClr val="tx1">
+                    <a:lumMod val="75000"/>
+                    <a:lumOff val="25000"/>
+                  </a:schemeClr>
+                </a:solidFill>
+                <a:latin typeface="Arial"/>
+                <a:ea typeface="Arial"/>
+                <a:cs typeface="Arial"/>
+              </a:rPr>
+              <a:t>kontektualisasi </a:t>
+            </a:r>
+            <a:r>
+              <a:rPr lang="en-US" sz="3200" b="0" i="0" u="none" strike="noStrike" cap="none" spc="0">
+                <a:solidFill>
+                  <a:schemeClr val="tx1">
+                    <a:lumMod val="75000"/>
+                    <a:lumOff val="25000"/>
+                  </a:schemeClr>
+                </a:solidFill>
+                <a:latin typeface="Arial"/>
+                <a:ea typeface="Arial"/>
+                <a:cs typeface="Arial"/>
+              </a:rPr>
+              <a:t>: menerapkan teori/metode eksisting untuk domain masalah baru (yang dirasa penting), barangkali juga dampaknya di konteks masalah asli di lapangan</a:t>
+            </a:r>
+            <a:endParaRPr lang="en-US" sz="3200" b="0" i="0" u="none" strike="noStrike" cap="none" spc="0">
+              <a:solidFill>
+                <a:schemeClr val="tx1">
+                  <a:lumMod val="75000"/>
+                  <a:lumOff val="25000"/>
+                </a:schemeClr>
+              </a:solidFill>
+              <a:latin typeface="Arial"/>
+              <a:cs typeface="Arial"/>
+            </a:endParaRPr>
+          </a:p>
+          <a:p>
+            <a:pPr>
+              <a:defRPr/>
+            </a:pPr>
+            <a:r>
+              <a:rPr lang="en-US" sz="3200" b="1" i="0" u="none" strike="noStrike" cap="none" spc="0">
+                <a:solidFill>
+                  <a:schemeClr val="tx1">
+                    <a:lumMod val="75000"/>
+                    <a:lumOff val="25000"/>
+                  </a:schemeClr>
+                </a:solidFill>
+                <a:latin typeface="Arial"/>
+                <a:ea typeface="Arial"/>
+                <a:cs typeface="Arial"/>
+              </a:rPr>
+              <a:t>kritik</a:t>
+            </a:r>
+            <a:r>
+              <a:rPr lang="en-US" sz="3200" b="0" i="0" u="none" strike="noStrike" cap="none" spc="0">
+                <a:solidFill>
+                  <a:schemeClr val="tx1">
+                    <a:lumMod val="75000"/>
+                    <a:lumOff val="25000"/>
+                  </a:schemeClr>
+                </a:solidFill>
+                <a:latin typeface="Arial"/>
+                <a:ea typeface="Arial"/>
+                <a:cs typeface="Arial"/>
+              </a:rPr>
+              <a:t>: interpretasi atau evaluasi ulang dari hasil sebelumnya (yang dirasa kurang 'clep')</a:t>
             </a:r>
             <a:endParaRPr/>
           </a:p>

--- a/case_scholarlyarticles.pptx
+++ b/case_scholarlyarticles.pptx
@@ -144,7 +144,7 @@
       </p:grpSpPr>
       <p:sp>
         <p:nvSpPr>
-          <p:cNvPr id="824558588" name="Header Placeholder 1"/>
+          <p:cNvPr id="1974869451" name="Header Placeholder 1"/>
           <p:cNvSpPr>
             <a:spLocks noGrp="1"/>
           </p:cNvSpPr>
@@ -178,7 +178,7 @@
       </p:sp>
       <p:sp>
         <p:nvSpPr>
-          <p:cNvPr id="1115815158" name="Date Placeholder 2"/>
+          <p:cNvPr id="1544961116" name="Date Placeholder 2"/>
           <p:cNvSpPr>
             <a:spLocks noGrp="1"/>
           </p:cNvSpPr>
@@ -216,7 +216,7 @@
       </p:sp>
       <p:sp>
         <p:nvSpPr>
-          <p:cNvPr id="1571754786" name="Slide Image Placeholder 3"/>
+          <p:cNvPr id="1622213970" name="Slide Image Placeholder 3"/>
           <p:cNvSpPr>
             <a:spLocks noChangeAspect="1" noGrp="1" noRot="1"/>
           </p:cNvSpPr>
@@ -252,7 +252,7 @@
       </p:sp>
       <p:sp>
         <p:nvSpPr>
-          <p:cNvPr id="243113958" name="Notes Placeholder 4"/>
+          <p:cNvPr id="1412255155" name="Notes Placeholder 4"/>
           <p:cNvSpPr>
             <a:spLocks noGrp="1"/>
           </p:cNvSpPr>
@@ -326,7 +326,7 @@
       </p:sp>
       <p:sp>
         <p:nvSpPr>
-          <p:cNvPr id="910312901" name="Footer Placeholder 5"/>
+          <p:cNvPr id="1157233117" name="Footer Placeholder 5"/>
           <p:cNvSpPr>
             <a:spLocks noGrp="1"/>
           </p:cNvSpPr>
@@ -360,7 +360,7 @@
       </p:sp>
       <p:sp>
         <p:nvSpPr>
-          <p:cNvPr id="2449997" name="Slide Number Placeholder 6"/>
+          <p:cNvPr id="1639030286" name="Slide Number Placeholder 6"/>
           <p:cNvSpPr>
             <a:spLocks noGrp="1"/>
           </p:cNvSpPr>
@@ -513,7 +513,7 @@
       </p:grpSpPr>
       <p:sp>
         <p:nvSpPr>
-          <p:cNvPr id="68577273" name="Slide Image Placeholder 1"/>
+          <p:cNvPr id="802440691" name="Slide Image Placeholder 1"/>
           <p:cNvSpPr>
             <a:spLocks noChangeAspect="1" noGrp="1" noRot="1"/>
           </p:cNvSpPr>
@@ -530,7 +530,7 @@
       </p:sp>
       <p:sp>
         <p:nvSpPr>
-          <p:cNvPr id="1872427161" name="Notes Placeholder 2"/>
+          <p:cNvPr id="921942985" name="Notes Placeholder 2"/>
           <p:cNvSpPr>
             <a:spLocks noGrp="1"/>
           </p:cNvSpPr>
@@ -555,7 +555,7 @@
       </p:sp>
       <p:sp>
         <p:nvSpPr>
-          <p:cNvPr id="204564610" name="Slide Number Placeholder 3"/>
+          <p:cNvPr id="1661313639" name="Slide Number Placeholder 3"/>
           <p:cNvSpPr>
             <a:spLocks noGrp="1"/>
           </p:cNvSpPr>
@@ -776,7 +776,7 @@
       </p:grpSpPr>
       <p:sp>
         <p:nvSpPr>
-          <p:cNvPr id="564305411" name="Slide Image Placeholder 1"/>
+          <p:cNvPr id="1964774759" name="Slide Image Placeholder 1"/>
           <p:cNvSpPr>
             <a:spLocks noChangeAspect="1" noGrp="1" noRot="1"/>
           </p:cNvSpPr>
@@ -788,7 +788,7 @@
       </p:sp>
       <p:sp>
         <p:nvSpPr>
-          <p:cNvPr id="750949451" name="Notes Placeholder 2"/>
+          <p:cNvPr id="1745598113" name="Notes Placeholder 2"/>
           <p:cNvSpPr>
             <a:spLocks noGrp="1"/>
           </p:cNvSpPr>
@@ -810,7 +810,7 @@
       </p:sp>
       <p:sp>
         <p:nvSpPr>
-          <p:cNvPr id="1344272203" name="Slide Number Placeholder 3"/>
+          <p:cNvPr id="1530785989" name="Slide Number Placeholder 3"/>
           <p:cNvSpPr>
             <a:spLocks noGrp="1"/>
           </p:cNvSpPr>
@@ -1456,7 +1456,7 @@
       </p:grpSpPr>
       <p:sp>
         <p:nvSpPr>
-          <p:cNvPr id="210350117" name="Shape 1059"/>
+          <p:cNvPr id="788951197" name="Shape 1059"/>
           <p:cNvSpPr>
             <a:spLocks noChangeArrowheads="1" noGrp="1"/>
           </p:cNvSpPr>
@@ -1579,7 +1579,7 @@
       </p:sp>
       <p:sp>
         <p:nvSpPr>
-          <p:cNvPr id="144625546" name="Shape 1060"/>
+          <p:cNvPr id="1648368134" name="Shape 1060"/>
           <p:cNvSpPr>
             <a:spLocks noChangeArrowheads="1" noGrp="1"/>
           </p:cNvSpPr>
@@ -1670,7 +1670,7 @@
       </p:sp>
       <p:sp>
         <p:nvSpPr>
-          <p:cNvPr id="1583767507" name="Shape 1061"/>
+          <p:cNvPr id="1148102775" name="Shape 1061"/>
           <p:cNvSpPr>
             <a:spLocks noChangeArrowheads="1" noGrp="1"/>
           </p:cNvSpPr>
@@ -1756,7 +1756,7 @@
       </p:sp>
       <p:sp>
         <p:nvSpPr>
-          <p:cNvPr id="390104417" name="Shape 1062"/>
+          <p:cNvPr id="1840905579" name="Shape 1062"/>
           <p:cNvSpPr>
             <a:spLocks noChangeArrowheads="1" noGrp="1"/>
           </p:cNvSpPr>
@@ -1834,7 +1834,7 @@
       </p:sp>
       <p:sp>
         <p:nvSpPr>
-          <p:cNvPr id="1856907771" name="Shape 1063"/>
+          <p:cNvPr id="2057565708" name="Shape 1063"/>
           <p:cNvSpPr>
             <a:spLocks noChangeArrowheads="1" noGrp="1"/>
           </p:cNvSpPr>
@@ -1912,7 +1912,7 @@
       </p:sp>
       <p:sp>
         <p:nvSpPr>
-          <p:cNvPr id="1227373894" name="Subtitle 2"/>
+          <p:cNvPr id="994188727" name="Subtitle 2"/>
           <p:cNvSpPr>
             <a:spLocks noGrp="1"/>
           </p:cNvSpPr>
@@ -2035,7 +2035,7 @@
       </p:sp>
       <p:sp>
         <p:nvSpPr>
-          <p:cNvPr id="1205926863" name="Date Placeholder 3"/>
+          <p:cNvPr id="1735227692" name="Date Placeholder 3"/>
           <p:cNvSpPr>
             <a:spLocks noGrp="1"/>
           </p:cNvSpPr>
@@ -2061,7 +2061,7 @@
       </p:sp>
       <p:sp>
         <p:nvSpPr>
-          <p:cNvPr id="1986409510" name="Footer Placeholder 4"/>
+          <p:cNvPr id="375419489" name="Footer Placeholder 4"/>
           <p:cNvSpPr>
             <a:spLocks noGrp="1"/>
           </p:cNvSpPr>
@@ -2083,7 +2083,7 @@
       </p:sp>
       <p:sp>
         <p:nvSpPr>
-          <p:cNvPr id="669446441" name="Slide Number Placeholder 5"/>
+          <p:cNvPr id="889158599" name="Slide Number Placeholder 5"/>
           <p:cNvSpPr>
             <a:spLocks noGrp="1"/>
           </p:cNvSpPr>
@@ -2109,7 +2109,7 @@
       </p:sp>
       <p:sp>
         <p:nvSpPr>
-          <p:cNvPr id="1261768850" name="Title 6"/>
+          <p:cNvPr id="821682726" name="Title 6"/>
           <p:cNvSpPr>
             <a:spLocks noGrp="1"/>
           </p:cNvSpPr>
@@ -2169,7 +2169,7 @@
       </p:grpSpPr>
       <p:sp>
         <p:nvSpPr>
-          <p:cNvPr id="186565616" name="Title 1"/>
+          <p:cNvPr id="1320262493" name="Title 1"/>
           <p:cNvSpPr>
             <a:spLocks noGrp="1"/>
           </p:cNvSpPr>
@@ -2195,7 +2195,7 @@
       </p:sp>
       <p:sp>
         <p:nvSpPr>
-          <p:cNvPr id="1342664849" name="Vertical Text Placeholder 2"/>
+          <p:cNvPr id="949067928" name="Vertical Text Placeholder 2"/>
           <p:cNvSpPr>
             <a:spLocks noGrp="1"/>
           </p:cNvSpPr>
@@ -2261,7 +2261,7 @@
       </p:sp>
       <p:sp>
         <p:nvSpPr>
-          <p:cNvPr id="1463374733" name="Date Placeholder 3"/>
+          <p:cNvPr id="1730384470" name="Date Placeholder 3"/>
           <p:cNvSpPr>
             <a:spLocks noGrp="1"/>
           </p:cNvSpPr>
@@ -2287,7 +2287,7 @@
       </p:sp>
       <p:sp>
         <p:nvSpPr>
-          <p:cNvPr id="1732461730" name="Footer Placeholder 4"/>
+          <p:cNvPr id="997905179" name="Footer Placeholder 4"/>
           <p:cNvSpPr>
             <a:spLocks noGrp="1"/>
           </p:cNvSpPr>
@@ -2309,7 +2309,7 @@
       </p:sp>
       <p:sp>
         <p:nvSpPr>
-          <p:cNvPr id="1215045821" name="Slide Number Placeholder 5"/>
+          <p:cNvPr id="838921452" name="Slide Number Placeholder 5"/>
           <p:cNvSpPr>
             <a:spLocks noGrp="1"/>
           </p:cNvSpPr>
@@ -2360,7 +2360,7 @@
       </p:grpSpPr>
       <p:sp>
         <p:nvSpPr>
-          <p:cNvPr id="1410223096" name="Vertical Title 1"/>
+          <p:cNvPr id="2122259755" name="Vertical Title 1"/>
           <p:cNvSpPr>
             <a:spLocks noGrp="1"/>
           </p:cNvSpPr>
@@ -2395,7 +2395,7 @@
       </p:sp>
       <p:sp>
         <p:nvSpPr>
-          <p:cNvPr id="954393325" name="Vertical Text Placeholder 2"/>
+          <p:cNvPr id="930375674" name="Vertical Text Placeholder 2"/>
           <p:cNvSpPr>
             <a:spLocks noGrp="1"/>
           </p:cNvSpPr>
@@ -2466,7 +2466,7 @@
       </p:sp>
       <p:sp>
         <p:nvSpPr>
-          <p:cNvPr id="699894294" name="Date Placeholder 3"/>
+          <p:cNvPr id="1174165060" name="Date Placeholder 3"/>
           <p:cNvSpPr>
             <a:spLocks noGrp="1"/>
           </p:cNvSpPr>
@@ -2492,7 +2492,7 @@
       </p:sp>
       <p:sp>
         <p:nvSpPr>
-          <p:cNvPr id="1184358025" name="Footer Placeholder 4"/>
+          <p:cNvPr id="1573681054" name="Footer Placeholder 4"/>
           <p:cNvSpPr>
             <a:spLocks noGrp="1"/>
           </p:cNvSpPr>
@@ -2514,7 +2514,7 @@
       </p:sp>
       <p:sp>
         <p:nvSpPr>
-          <p:cNvPr id="1668429431" name="Slide Number Placeholder 5"/>
+          <p:cNvPr id="1672396494" name="Slide Number Placeholder 5"/>
           <p:cNvSpPr>
             <a:spLocks noGrp="1"/>
           </p:cNvSpPr>
@@ -2565,7 +2565,7 @@
       </p:grpSpPr>
       <p:sp>
         <p:nvSpPr>
-          <p:cNvPr id="1042785177" name="Title 1"/>
+          <p:cNvPr id="829193295" name="Title 1"/>
           <p:cNvSpPr>
             <a:spLocks noGrp="1"/>
           </p:cNvSpPr>
@@ -2591,7 +2591,7 @@
       </p:sp>
       <p:sp>
         <p:nvSpPr>
-          <p:cNvPr id="1981065593" name="Content Placeholder 2"/>
+          <p:cNvPr id="1074399983" name="Content Placeholder 2"/>
           <p:cNvSpPr>
             <a:spLocks noGrp="1"/>
           </p:cNvSpPr>
@@ -2657,7 +2657,7 @@
       </p:sp>
       <p:sp>
         <p:nvSpPr>
-          <p:cNvPr id="1152324880" name="Date Placeholder 3"/>
+          <p:cNvPr id="391287397" name="Date Placeholder 3"/>
           <p:cNvSpPr>
             <a:spLocks noGrp="1"/>
           </p:cNvSpPr>
@@ -2683,7 +2683,7 @@
       </p:sp>
       <p:sp>
         <p:nvSpPr>
-          <p:cNvPr id="1925191405" name="Footer Placeholder 4"/>
+          <p:cNvPr id="420198881" name="Footer Placeholder 4"/>
           <p:cNvSpPr>
             <a:spLocks noGrp="1"/>
           </p:cNvSpPr>
@@ -2705,7 +2705,7 @@
       </p:sp>
       <p:sp>
         <p:nvSpPr>
-          <p:cNvPr id="2057243377" name="Slide Number Placeholder 5"/>
+          <p:cNvPr id="158311302" name="Slide Number Placeholder 5"/>
           <p:cNvSpPr>
             <a:spLocks noGrp="1"/>
           </p:cNvSpPr>
@@ -2756,7 +2756,7 @@
       </p:grpSpPr>
       <p:sp>
         <p:nvSpPr>
-          <p:cNvPr id="1264091590" name="Title 1"/>
+          <p:cNvPr id="322174172" name="Title 1"/>
           <p:cNvSpPr>
             <a:spLocks noGrp="1"/>
           </p:cNvSpPr>
@@ -2791,7 +2791,7 @@
       </p:sp>
       <p:sp>
         <p:nvSpPr>
-          <p:cNvPr id="906374721" name="Text Placeholder 2"/>
+          <p:cNvPr id="284498357" name="Text Placeholder 2"/>
           <p:cNvSpPr>
             <a:spLocks noGrp="1"/>
           </p:cNvSpPr>
@@ -2913,7 +2913,7 @@
       </p:sp>
       <p:sp>
         <p:nvSpPr>
-          <p:cNvPr id="772996041" name="Date Placeholder 3"/>
+          <p:cNvPr id="1530772615" name="Date Placeholder 3"/>
           <p:cNvSpPr>
             <a:spLocks noGrp="1"/>
           </p:cNvSpPr>
@@ -2939,7 +2939,7 @@
       </p:sp>
       <p:sp>
         <p:nvSpPr>
-          <p:cNvPr id="1131561121" name="Footer Placeholder 4"/>
+          <p:cNvPr id="1759725245" name="Footer Placeholder 4"/>
           <p:cNvSpPr>
             <a:spLocks noGrp="1"/>
           </p:cNvSpPr>
@@ -2961,7 +2961,7 @@
       </p:sp>
       <p:sp>
         <p:nvSpPr>
-          <p:cNvPr id="96536734" name="Slide Number Placeholder 5"/>
+          <p:cNvPr id="1732038382" name="Slide Number Placeholder 5"/>
           <p:cNvSpPr>
             <a:spLocks noGrp="1"/>
           </p:cNvSpPr>
@@ -3012,7 +3012,7 @@
       </p:grpSpPr>
       <p:sp>
         <p:nvSpPr>
-          <p:cNvPr id="665201" name="Title 1"/>
+          <p:cNvPr id="1782992123" name="Title 1"/>
           <p:cNvSpPr>
             <a:spLocks noGrp="1"/>
           </p:cNvSpPr>
@@ -3038,7 +3038,7 @@
       </p:sp>
       <p:sp>
         <p:nvSpPr>
-          <p:cNvPr id="1013434165" name="Content Placeholder 2"/>
+          <p:cNvPr id="1125228179" name="Content Placeholder 2"/>
           <p:cNvSpPr>
             <a:spLocks noGrp="1"/>
           </p:cNvSpPr>
@@ -3137,7 +3137,7 @@
       </p:sp>
       <p:sp>
         <p:nvSpPr>
-          <p:cNvPr id="1449768381" name="Content Placeholder 3"/>
+          <p:cNvPr id="1008313495" name="Content Placeholder 3"/>
           <p:cNvSpPr>
             <a:spLocks noGrp="1"/>
           </p:cNvSpPr>
@@ -3236,7 +3236,7 @@
       </p:sp>
       <p:sp>
         <p:nvSpPr>
-          <p:cNvPr id="980804143" name="Date Placeholder 4"/>
+          <p:cNvPr id="2087493750" name="Date Placeholder 4"/>
           <p:cNvSpPr>
             <a:spLocks noGrp="1"/>
           </p:cNvSpPr>
@@ -3262,7 +3262,7 @@
       </p:sp>
       <p:sp>
         <p:nvSpPr>
-          <p:cNvPr id="1353838068" name="Footer Placeholder 5"/>
+          <p:cNvPr id="568268167" name="Footer Placeholder 5"/>
           <p:cNvSpPr>
             <a:spLocks noGrp="1"/>
           </p:cNvSpPr>
@@ -3284,7 +3284,7 @@
       </p:sp>
       <p:sp>
         <p:nvSpPr>
-          <p:cNvPr id="376083615" name="Slide Number Placeholder 6"/>
+          <p:cNvPr id="17658328" name="Slide Number Placeholder 6"/>
           <p:cNvSpPr>
             <a:spLocks noGrp="1"/>
           </p:cNvSpPr>
@@ -3335,7 +3335,7 @@
       </p:grpSpPr>
       <p:sp>
         <p:nvSpPr>
-          <p:cNvPr id="1791916726" name="Title 1"/>
+          <p:cNvPr id="1913087666" name="Title 1"/>
           <p:cNvSpPr>
             <a:spLocks noGrp="1"/>
           </p:cNvSpPr>
@@ -3365,7 +3365,7 @@
       </p:sp>
       <p:sp>
         <p:nvSpPr>
-          <p:cNvPr id="656090377" name="Text Placeholder 2"/>
+          <p:cNvPr id="1730517005" name="Text Placeholder 2"/>
           <p:cNvSpPr>
             <a:spLocks noGrp="1"/>
           </p:cNvSpPr>
@@ -3433,7 +3433,7 @@
       </p:sp>
       <p:sp>
         <p:nvSpPr>
-          <p:cNvPr id="645828616" name="Content Placeholder 3"/>
+          <p:cNvPr id="1985057894" name="Content Placeholder 3"/>
           <p:cNvSpPr>
             <a:spLocks noGrp="1"/>
           </p:cNvSpPr>
@@ -3532,7 +3532,7 @@
       </p:sp>
       <p:sp>
         <p:nvSpPr>
-          <p:cNvPr id="2010518862" name="Text Placeholder 4"/>
+          <p:cNvPr id="1405951884" name="Text Placeholder 4"/>
           <p:cNvSpPr>
             <a:spLocks noGrp="1"/>
           </p:cNvSpPr>
@@ -3600,7 +3600,7 @@
       </p:sp>
       <p:sp>
         <p:nvSpPr>
-          <p:cNvPr id="901205044" name="Content Placeholder 5"/>
+          <p:cNvPr id="1232614113" name="Content Placeholder 5"/>
           <p:cNvSpPr>
             <a:spLocks noGrp="1"/>
           </p:cNvSpPr>
@@ -3699,7 +3699,7 @@
       </p:sp>
       <p:sp>
         <p:nvSpPr>
-          <p:cNvPr id="1834503929" name="Date Placeholder 6"/>
+          <p:cNvPr id="388041402" name="Date Placeholder 6"/>
           <p:cNvSpPr>
             <a:spLocks noGrp="1"/>
           </p:cNvSpPr>
@@ -3725,7 +3725,7 @@
       </p:sp>
       <p:sp>
         <p:nvSpPr>
-          <p:cNvPr id="201354053" name="Footer Placeholder 7"/>
+          <p:cNvPr id="811665582" name="Footer Placeholder 7"/>
           <p:cNvSpPr>
             <a:spLocks noGrp="1"/>
           </p:cNvSpPr>
@@ -3747,7 +3747,7 @@
       </p:sp>
       <p:sp>
         <p:nvSpPr>
-          <p:cNvPr id="168066787" name="Slide Number Placeholder 8"/>
+          <p:cNvPr id="1282599625" name="Slide Number Placeholder 8"/>
           <p:cNvSpPr>
             <a:spLocks noGrp="1"/>
           </p:cNvSpPr>
@@ -3798,7 +3798,7 @@
       </p:grpSpPr>
       <p:sp>
         <p:nvSpPr>
-          <p:cNvPr id="470426687" name="Title 1"/>
+          <p:cNvPr id="813178191" name="Title 1"/>
           <p:cNvSpPr>
             <a:spLocks noGrp="1"/>
           </p:cNvSpPr>
@@ -3824,7 +3824,7 @@
       </p:sp>
       <p:sp>
         <p:nvSpPr>
-          <p:cNvPr id="1161313728" name="Date Placeholder 2"/>
+          <p:cNvPr id="1008996193" name="Date Placeholder 2"/>
           <p:cNvSpPr>
             <a:spLocks noGrp="1"/>
           </p:cNvSpPr>
@@ -3850,7 +3850,7 @@
       </p:sp>
       <p:sp>
         <p:nvSpPr>
-          <p:cNvPr id="186039753" name="Footer Placeholder 3"/>
+          <p:cNvPr id="1609282905" name="Footer Placeholder 3"/>
           <p:cNvSpPr>
             <a:spLocks noGrp="1"/>
           </p:cNvSpPr>
@@ -3872,7 +3872,7 @@
       </p:sp>
       <p:sp>
         <p:nvSpPr>
-          <p:cNvPr id="1879776695" name="Slide Number Placeholder 4"/>
+          <p:cNvPr id="1825245563" name="Slide Number Placeholder 4"/>
           <p:cNvSpPr>
             <a:spLocks noGrp="1"/>
           </p:cNvSpPr>
@@ -3923,7 +3923,7 @@
       </p:grpSpPr>
       <p:sp>
         <p:nvSpPr>
-          <p:cNvPr id="373334797" name="Date Placeholder 1"/>
+          <p:cNvPr id="1856088605" name="Date Placeholder 1"/>
           <p:cNvSpPr>
             <a:spLocks noGrp="1"/>
           </p:cNvSpPr>
@@ -3949,7 +3949,7 @@
       </p:sp>
       <p:sp>
         <p:nvSpPr>
-          <p:cNvPr id="804895766" name="Footer Placeholder 2"/>
+          <p:cNvPr id="1350658517" name="Footer Placeholder 2"/>
           <p:cNvSpPr>
             <a:spLocks noGrp="1"/>
           </p:cNvSpPr>
@@ -3971,7 +3971,7 @@
       </p:sp>
       <p:sp>
         <p:nvSpPr>
-          <p:cNvPr id="1234439627" name="Slide Number Placeholder 3"/>
+          <p:cNvPr id="324687573" name="Slide Number Placeholder 3"/>
           <p:cNvSpPr>
             <a:spLocks noGrp="1"/>
           </p:cNvSpPr>
@@ -4022,7 +4022,7 @@
       </p:grpSpPr>
       <p:sp>
         <p:nvSpPr>
-          <p:cNvPr id="302270424" name="Title 1"/>
+          <p:cNvPr id="627680308" name="Title 1"/>
           <p:cNvSpPr>
             <a:spLocks noGrp="1"/>
           </p:cNvSpPr>
@@ -4057,7 +4057,7 @@
       </p:sp>
       <p:sp>
         <p:nvSpPr>
-          <p:cNvPr id="1231680934" name="Content Placeholder 2"/>
+          <p:cNvPr id="689418534" name="Content Placeholder 2"/>
           <p:cNvSpPr>
             <a:spLocks noGrp="1"/>
           </p:cNvSpPr>
@@ -4156,7 +4156,7 @@
       </p:sp>
       <p:sp>
         <p:nvSpPr>
-          <p:cNvPr id="13276207" name="Text Placeholder 3"/>
+          <p:cNvPr id="673800455" name="Text Placeholder 3"/>
           <p:cNvSpPr>
             <a:spLocks noGrp="1"/>
           </p:cNvSpPr>
@@ -4224,7 +4224,7 @@
       </p:sp>
       <p:sp>
         <p:nvSpPr>
-          <p:cNvPr id="860452258" name="Date Placeholder 4"/>
+          <p:cNvPr id="1636283236" name="Date Placeholder 4"/>
           <p:cNvSpPr>
             <a:spLocks noGrp="1"/>
           </p:cNvSpPr>
@@ -4250,7 +4250,7 @@
       </p:sp>
       <p:sp>
         <p:nvSpPr>
-          <p:cNvPr id="537131016" name="Footer Placeholder 5"/>
+          <p:cNvPr id="232530704" name="Footer Placeholder 5"/>
           <p:cNvSpPr>
             <a:spLocks noGrp="1"/>
           </p:cNvSpPr>
@@ -4272,7 +4272,7 @@
       </p:sp>
       <p:sp>
         <p:nvSpPr>
-          <p:cNvPr id="841981714" name="Slide Number Placeholder 6"/>
+          <p:cNvPr id="610420933" name="Slide Number Placeholder 6"/>
           <p:cNvSpPr>
             <a:spLocks noGrp="1"/>
           </p:cNvSpPr>
@@ -4323,7 +4323,7 @@
       </p:grpSpPr>
       <p:sp>
         <p:nvSpPr>
-          <p:cNvPr id="460457528" name="Title 1"/>
+          <p:cNvPr id="1805709938" name="Title 1"/>
           <p:cNvSpPr>
             <a:spLocks noGrp="1"/>
           </p:cNvSpPr>
@@ -4358,7 +4358,7 @@
       </p:sp>
       <p:sp>
         <p:nvSpPr>
-          <p:cNvPr id="962733121" name="Picture Placeholder 2"/>
+          <p:cNvPr id="543206965" name="Picture Placeholder 2"/>
           <p:cNvSpPr>
             <a:spLocks noGrp="1"/>
           </p:cNvSpPr>
@@ -4422,7 +4422,7 @@
       </p:sp>
       <p:sp>
         <p:nvSpPr>
-          <p:cNvPr id="1900761173" name="Text Placeholder 3"/>
+          <p:cNvPr id="1739159444" name="Text Placeholder 3"/>
           <p:cNvSpPr>
             <a:spLocks noGrp="1"/>
           </p:cNvSpPr>
@@ -4490,7 +4490,7 @@
       </p:sp>
       <p:sp>
         <p:nvSpPr>
-          <p:cNvPr id="2101737122" name="Date Placeholder 4"/>
+          <p:cNvPr id="1710681017" name="Date Placeholder 4"/>
           <p:cNvSpPr>
             <a:spLocks noGrp="1"/>
           </p:cNvSpPr>
@@ -4516,7 +4516,7 @@
       </p:sp>
       <p:sp>
         <p:nvSpPr>
-          <p:cNvPr id="1828566181" name="Footer Placeholder 5"/>
+          <p:cNvPr id="1399819034" name="Footer Placeholder 5"/>
           <p:cNvSpPr>
             <a:spLocks noGrp="1"/>
           </p:cNvSpPr>
@@ -4538,7 +4538,7 @@
       </p:sp>
       <p:sp>
         <p:nvSpPr>
-          <p:cNvPr id="1473084830" name="Slide Number Placeholder 6"/>
+          <p:cNvPr id="1173731201" name="Slide Number Placeholder 6"/>
           <p:cNvSpPr>
             <a:spLocks noGrp="1"/>
           </p:cNvSpPr>
@@ -4594,7 +4594,7 @@
       </p:grpSpPr>
       <p:sp>
         <p:nvSpPr>
-          <p:cNvPr id="733123113" name="Shape 1059"/>
+          <p:cNvPr id="2127479029" name="Shape 1059"/>
           <p:cNvSpPr>
             <a:spLocks noChangeArrowheads="1" noGrp="1"/>
           </p:cNvSpPr>
@@ -4672,7 +4672,7 @@
       </p:sp>
       <p:sp>
         <p:nvSpPr>
-          <p:cNvPr id="1909281648" name="Shape 1060"/>
+          <p:cNvPr id="1637567308" name="Shape 1060"/>
           <p:cNvSpPr>
             <a:spLocks noChangeArrowheads="1" noGrp="1"/>
           </p:cNvSpPr>
@@ -4753,7 +4753,7 @@
       </p:sp>
       <p:sp>
         <p:nvSpPr>
-          <p:cNvPr id="1021197910" name="Shape 1061"/>
+          <p:cNvPr id="1635099206" name="Shape 1061"/>
           <p:cNvSpPr>
             <a:spLocks noChangeArrowheads="1" noGrp="1"/>
           </p:cNvSpPr>
@@ -4871,7 +4871,7 @@
       </p:sp>
       <p:sp>
         <p:nvSpPr>
-          <p:cNvPr id="1851838896" name="Title 1"/>
+          <p:cNvPr id="209946346" name="Title 1"/>
           <p:cNvSpPr>
             <a:spLocks noGrp="1"/>
           </p:cNvSpPr>
@@ -4907,7 +4907,7 @@
       </p:sp>
       <p:sp>
         <p:nvSpPr>
-          <p:cNvPr id="1482665706" name="Text Placeholder 2"/>
+          <p:cNvPr id="1484460776" name="Text Placeholder 2"/>
           <p:cNvSpPr>
             <a:spLocks noGrp="1"/>
           </p:cNvSpPr>
@@ -4983,7 +4983,7 @@
       </p:sp>
       <p:sp>
         <p:nvSpPr>
-          <p:cNvPr id="40624892" name="Date Placeholder 3"/>
+          <p:cNvPr id="1869674072" name="Date Placeholder 3"/>
           <p:cNvSpPr>
             <a:spLocks noGrp="1"/>
           </p:cNvSpPr>
@@ -5027,7 +5027,7 @@
       </p:sp>
       <p:sp>
         <p:nvSpPr>
-          <p:cNvPr id="1976673758" name="Footer Placeholder 4"/>
+          <p:cNvPr id="2069909316" name="Footer Placeholder 4"/>
           <p:cNvSpPr>
             <a:spLocks noGrp="1"/>
           </p:cNvSpPr>
@@ -5067,7 +5067,7 @@
       </p:sp>
       <p:sp>
         <p:nvSpPr>
-          <p:cNvPr id="1710008164" name="Slide Number Placeholder 5"/>
+          <p:cNvPr id="656681821" name="Slide Number Placeholder 5"/>
           <p:cNvSpPr>
             <a:spLocks noGrp="1"/>
           </p:cNvSpPr>
@@ -5415,7 +5415,7 @@
       </p:grpSpPr>
       <p:sp>
         <p:nvSpPr>
-          <p:cNvPr id="161894971" name="Title 1"/>
+          <p:cNvPr id="1547338698" name="Title 1"/>
           <p:cNvSpPr>
             <a:spLocks noGrp="1"/>
           </p:cNvSpPr>
@@ -5452,7 +5452,7 @@
       </p:sp>
       <p:sp>
         <p:nvSpPr>
-          <p:cNvPr id="1610229070" name=""/>
+          <p:cNvPr id="1369377536" name=""/>
           <p:cNvSpPr txBox="1"/>
           <p:nvPr/>
         </p:nvSpPr>
@@ -6607,12 +6607,19 @@
             <p:ph idx="1"/>
           </p:nvPr>
         </p:nvSpPr>
-        <p:spPr bwMode="auto"/>
+        <p:spPr bwMode="auto">
+          <a:xfrm>
+            <a:off x="533398" y="1257300"/>
+            <a:ext cx="10972800" cy="4525961"/>
+          </a:xfrm>
+        </p:spPr>
         <p:txBody>
           <a:bodyPr/>
           <a:lstStyle/>
           <a:p>
-            <a:pPr>
+            <a:pPr marL="0" indent="0">
+              <a:buFont typeface="Arial"/>
+              <a:buNone/>
               <a:defRPr/>
             </a:pPr>
             <a:r>
@@ -6654,6 +6661,18 @@
             <a:r>
               <a:rPr sz="2800"/>
               <a:t>), SINTA (dosen-administratif), ARJUNA (portal akreditasi jurnal)</a:t>
+            </a:r>
+            <a:endParaRPr sz="2800"/>
+          </a:p>
+          <a:p>
+            <a:pPr>
+              <a:buFont typeface="Arial"/>
+              <a:buChar char="–"/>
+              <a:defRPr/>
+            </a:pPr>
+            <a:r>
+              <a:rPr sz="2800"/>
+              <a:t>BRIN</a:t>
             </a:r>
             <a:endParaRPr sz="2800"/>
           </a:p>
@@ -6736,9 +6755,9 @@
           <a:stretch/>
         </p:blipFill>
         <p:spPr bwMode="auto">
-          <a:xfrm>
-            <a:off x="7311443" y="5957686"/>
-            <a:ext cx="1628775" cy="609599"/>
+          <a:xfrm flipH="0" flipV="0">
+            <a:off x="8477249" y="5933500"/>
+            <a:ext cx="1567255" cy="586575"/>
           </a:xfrm>
           <a:prstGeom prst="rect">
             <a:avLst/>
@@ -6759,8 +6778,8 @@
         </p:blipFill>
         <p:spPr bwMode="auto">
           <a:xfrm flipH="0" flipV="0">
-            <a:off x="5929647" y="5965212"/>
-            <a:ext cx="1624647" cy="654078"/>
+            <a:off x="5396247" y="5869071"/>
+            <a:ext cx="1563284" cy="629373"/>
           </a:xfrm>
           <a:prstGeom prst="rect">
             <a:avLst/>
@@ -6781,8 +6800,8 @@
         </p:blipFill>
         <p:spPr bwMode="auto">
           <a:xfrm flipH="0" flipV="0">
-            <a:off x="1490492" y="6039414"/>
-            <a:ext cx="2252253" cy="527871"/>
+            <a:off x="1358770" y="5929791"/>
+            <a:ext cx="2167185" cy="507934"/>
           </a:xfrm>
           <a:prstGeom prst="rect">
             <a:avLst/>
@@ -6802,9 +6821,9 @@
           <a:stretch/>
         </p:blipFill>
         <p:spPr bwMode="auto">
-          <a:xfrm>
-            <a:off x="3897401" y="5965212"/>
-            <a:ext cx="1971675" cy="676274"/>
+          <a:xfrm flipH="0" flipV="0">
+            <a:off x="3386782" y="5824699"/>
+            <a:ext cx="1897203" cy="650731"/>
           </a:xfrm>
           <a:prstGeom prst="rect">
             <a:avLst/>
@@ -6847,8 +6866,8 @@
         </p:blipFill>
         <p:spPr bwMode="auto">
           <a:xfrm flipH="0" flipV="0">
-            <a:off x="53661" y="6039414"/>
-            <a:ext cx="1356337" cy="527871"/>
+            <a:off x="53661" y="5869071"/>
+            <a:ext cx="1305108" cy="507934"/>
           </a:xfrm>
           <a:prstGeom prst="rect">
             <a:avLst/>
@@ -6869,8 +6888,8 @@
         </p:blipFill>
         <p:spPr bwMode="auto">
           <a:xfrm flipH="0" flipV="0">
-            <a:off x="9095017" y="5960495"/>
-            <a:ext cx="847235" cy="549640"/>
+            <a:off x="10150273" y="5885625"/>
+            <a:ext cx="815235" cy="528880"/>
           </a:xfrm>
           <a:prstGeom prst="rect">
             <a:avLst/>
@@ -6891,8 +6910,30 @@
         </p:blipFill>
         <p:spPr bwMode="auto">
           <a:xfrm flipH="0" flipV="0">
-            <a:off x="10135748" y="5956728"/>
-            <a:ext cx="1282209" cy="611515"/>
+            <a:off x="10965508" y="5931657"/>
+            <a:ext cx="1233779" cy="588417"/>
+          </a:xfrm>
+          <a:prstGeom prst="rect">
+            <a:avLst/>
+          </a:prstGeom>
+        </p:spPr>
+      </p:pic>
+      <p:pic>
+        <p:nvPicPr>
+          <p:cNvPr id="1160252683" name=""/>
+          <p:cNvPicPr>
+            <a:picLocks noChangeAspect="1"/>
+          </p:cNvPicPr>
+          <p:nvPr/>
+        </p:nvPicPr>
+        <p:blipFill>
+          <a:blip r:embed="rId11"/>
+          <a:stretch/>
+        </p:blipFill>
+        <p:spPr bwMode="auto">
+          <a:xfrm flipH="0" flipV="0">
+            <a:off x="6849755" y="5844007"/>
+            <a:ext cx="1477044" cy="570498"/>
           </a:xfrm>
           <a:prstGeom prst="rect">
             <a:avLst/>
